--- a/exercises/1_unit-tests-and-coverage/instructions.pptx
+++ b/exercises/1_unit-tests-and-coverage/instructions.pptx
@@ -213,7 +213,7 @@
           <a:p>
             <a:fld id="{F78929D2-0E8B-4573-AA4B-C87D4F90B452}" type="datetimeFigureOut">
               <a:rPr lang="en-US" smtClean="0"/>
-              <a:t>6/27/2026</a:t>
+              <a:t>9/24/2026</a:t>
             </a:fld>
             <a:endParaRPr lang="en-US"/>
           </a:p>
@@ -7879,7 +7879,7 @@
           <a:p>
             <a:fld id="{8CF8D308-A2A6-458E-94F6-BC214F8ABC37}" type="datetime1">
               <a:rPr lang="en-US" smtClean="0"/>
-              <a:t>6/27/2026</a:t>
+              <a:t>9/24/2026</a:t>
             </a:fld>
             <a:endParaRPr lang="en-US"/>
           </a:p>
@@ -8077,7 +8077,7 @@
           <a:p>
             <a:fld id="{B75DB6CE-6FE7-4B2B-9FC6-2BCAE31CBB40}" type="datetime1">
               <a:rPr lang="en-US" smtClean="0"/>
-              <a:t>6/27/2026</a:t>
+              <a:t>9/24/2026</a:t>
             </a:fld>
             <a:endParaRPr lang="en-US"/>
           </a:p>
@@ -8285,7 +8285,7 @@
           <a:p>
             <a:fld id="{5ABCA857-2376-48D2-96A8-556A5B78D1EC}" type="datetime1">
               <a:rPr lang="en-US" smtClean="0"/>
-              <a:t>6/27/2026</a:t>
+              <a:t>9/24/2026</a:t>
             </a:fld>
             <a:endParaRPr lang="en-US"/>
           </a:p>
@@ -9680,7 +9680,7 @@
           <a:p>
             <a:fld id="{4D8885F6-4E0D-4F96-9D4A-701A51C03A8E}" type="datetime1">
               <a:rPr lang="en-US" smtClean="0"/>
-              <a:t>6/27/2026</a:t>
+              <a:t>9/24/2026</a:t>
             </a:fld>
             <a:endParaRPr lang="en-US"/>
           </a:p>
@@ -9955,7 +9955,7 @@
           <a:p>
             <a:fld id="{D0FE6074-FB5B-4111-AD69-45F699D11CEE}" type="datetime1">
               <a:rPr lang="en-US" smtClean="0"/>
-              <a:t>6/27/2026</a:t>
+              <a:t>9/24/2026</a:t>
             </a:fld>
             <a:endParaRPr lang="en-US"/>
           </a:p>
@@ -10220,7 +10220,7 @@
           <a:p>
             <a:fld id="{4D043287-A541-4FBC-9DFE-4C26D02CBEED}" type="datetime1">
               <a:rPr lang="en-US" smtClean="0"/>
-              <a:t>6/27/2026</a:t>
+              <a:t>9/24/2026</a:t>
             </a:fld>
             <a:endParaRPr lang="en-US"/>
           </a:p>
@@ -10632,7 +10632,7 @@
           <a:p>
             <a:fld id="{16F4DCE4-AB02-448D-8752-78E172822B45}" type="datetime1">
               <a:rPr lang="en-US" smtClean="0"/>
-              <a:t>6/27/2026</a:t>
+              <a:t>9/24/2026</a:t>
             </a:fld>
             <a:endParaRPr lang="en-US"/>
           </a:p>
@@ -10773,7 +10773,7 @@
           <a:p>
             <a:fld id="{306880FA-E6AF-4379-8F5E-BF92A0077603}" type="datetime1">
               <a:rPr lang="en-US" smtClean="0"/>
-              <a:t>6/27/2026</a:t>
+              <a:t>9/24/2026</a:t>
             </a:fld>
             <a:endParaRPr lang="en-US"/>
           </a:p>
@@ -10886,7 +10886,7 @@
           <a:p>
             <a:fld id="{118573D9-244C-41BD-9010-1679B124B651}" type="datetime1">
               <a:rPr lang="en-US" smtClean="0"/>
-              <a:t>6/27/2026</a:t>
+              <a:t>9/24/2026</a:t>
             </a:fld>
             <a:endParaRPr lang="en-US"/>
           </a:p>
@@ -11197,7 +11197,7 @@
           <a:p>
             <a:fld id="{FAE75AE8-4771-44FE-AD20-D090FAF8EACD}" type="datetime1">
               <a:rPr lang="en-US" smtClean="0"/>
-              <a:t>6/27/2026</a:t>
+              <a:t>9/24/2026</a:t>
             </a:fld>
             <a:endParaRPr lang="en-US"/>
           </a:p>
@@ -11485,7 +11485,7 @@
           <a:p>
             <a:fld id="{D972CF6E-9787-4A8B-BC44-1D044A98129C}" type="datetime1">
               <a:rPr lang="en-US" smtClean="0"/>
-              <a:t>6/27/2026</a:t>
+              <a:t>9/24/2026</a:t>
             </a:fld>
             <a:endParaRPr lang="en-US"/>
           </a:p>
@@ -11726,7 +11726,7 @@
           <a:p>
             <a:fld id="{BBCA354C-DC0A-4C3E-BF4A-9931F7807B94}" type="datetime1">
               <a:rPr lang="en-US" smtClean="0"/>
-              <a:t>6/27/2026</a:t>
+              <a:t>9/24/2026</a:t>
             </a:fld>
             <a:endParaRPr lang="en-US"/>
           </a:p>
